--- a/slides/16-modeling-lab.pptx
+++ b/slides/16-modeling-lab.pptx
@@ -5,12 +5,13 @@
     <p:sldMasterId id="2147483660" r:id="rId1"/>
   </p:sldMasterIdLst>
   <p:notesMasterIdLst>
-    <p:notesMasterId r:id="rId5"/>
+    <p:notesMasterId r:id="rId6"/>
   </p:notesMasterIdLst>
   <p:sldIdLst>
     <p:sldId id="256" r:id="rId2"/>
     <p:sldId id="257" r:id="rId3"/>
-    <p:sldId id="258" r:id="rId4"/>
+    <p:sldId id="259" r:id="rId4"/>
+    <p:sldId id="258" r:id="rId5"/>
   </p:sldIdLst>
   <p:sldSz cx="12192000" cy="6858000"/>
   <p:notesSz cx="6858000" cy="9144000"/>
@@ -199,7 +200,7 @@
           <a:p>
             <a:fld id="{2CD22518-F7FE-2E40-9C60-793856882CE6}" type="datetimeFigureOut">
               <a:rPr lang="en-US" smtClean="0"/>
-              <a:t>2/25/26</a:t>
+              <a:t>4/6/26</a:t>
             </a:fld>
             <a:endParaRPr lang="en-US"/>
           </a:p>
@@ -642,6 +643,114 @@
         <p:cNvPr id="1" name="">
           <a:extLst>
             <a:ext uri="{FF2B5EF4-FFF2-40B4-BE49-F238E27FC236}">
+              <a16:creationId xmlns:a16="http://schemas.microsoft.com/office/drawing/2014/main" id="{BA6E3A0F-3CC0-E722-8C32-DABC462D5061}"/>
+            </a:ext>
+          </a:extLst>
+        </p:cNvPr>
+        <p:cNvGrpSpPr/>
+        <p:nvPr/>
+      </p:nvGrpSpPr>
+      <p:grpSpPr>
+        <a:xfrm>
+          <a:off x="0" y="0"/>
+          <a:ext cx="0" cy="0"/>
+          <a:chOff x="0" y="0"/>
+          <a:chExt cx="0" cy="0"/>
+        </a:xfrm>
+      </p:grpSpPr>
+      <p:sp>
+        <p:nvSpPr>
+          <p:cNvPr id="2" name="Slide Image Placeholder 1">
+            <a:extLst>
+              <a:ext uri="{FF2B5EF4-FFF2-40B4-BE49-F238E27FC236}">
+                <a16:creationId xmlns:a16="http://schemas.microsoft.com/office/drawing/2014/main" id="{0A733D79-FF86-6BF4-2881-0705020FF405}"/>
+              </a:ext>
+            </a:extLst>
+          </p:cNvPr>
+          <p:cNvSpPr>
+            <a:spLocks noGrp="1" noRot="1" noChangeAspect="1"/>
+          </p:cNvSpPr>
+          <p:nvPr>
+            <p:ph type="sldImg"/>
+          </p:nvPr>
+        </p:nvSpPr>
+        <p:spPr/>
+      </p:sp>
+      <p:sp>
+        <p:nvSpPr>
+          <p:cNvPr id="3" name="Notes Placeholder 2">
+            <a:extLst>
+              <a:ext uri="{FF2B5EF4-FFF2-40B4-BE49-F238E27FC236}">
+                <a16:creationId xmlns:a16="http://schemas.microsoft.com/office/drawing/2014/main" id="{5B17FAE7-17CC-638B-B409-76F74C919F7F}"/>
+              </a:ext>
+            </a:extLst>
+          </p:cNvPr>
+          <p:cNvSpPr>
+            <a:spLocks noGrp="1"/>
+          </p:cNvSpPr>
+          <p:nvPr>
+            <p:ph type="body" idx="1"/>
+          </p:nvPr>
+        </p:nvSpPr>
+        <p:spPr/>
+        <p:txBody>
+          <a:bodyPr/>
+          <a:lstStyle/>
+          <a:p>
+            <a:endParaRPr lang="en-US" dirty="0"/>
+          </a:p>
+        </p:txBody>
+      </p:sp>
+      <p:sp>
+        <p:nvSpPr>
+          <p:cNvPr id="4" name="Slide Number Placeholder 3">
+            <a:extLst>
+              <a:ext uri="{FF2B5EF4-FFF2-40B4-BE49-F238E27FC236}">
+                <a16:creationId xmlns:a16="http://schemas.microsoft.com/office/drawing/2014/main" id="{A5D5A26F-5565-75E4-576A-3AEEBFF08F4F}"/>
+              </a:ext>
+            </a:extLst>
+          </p:cNvPr>
+          <p:cNvSpPr>
+            <a:spLocks noGrp="1"/>
+          </p:cNvSpPr>
+          <p:nvPr>
+            <p:ph type="sldNum" sz="quarter" idx="5"/>
+          </p:nvPr>
+        </p:nvSpPr>
+        <p:spPr/>
+        <p:txBody>
+          <a:bodyPr/>
+          <a:lstStyle/>
+          <a:p>
+            <a:fld id="{362CD335-F0CB-D347-B8A5-7AB70F34C34F}" type="slidenum">
+              <a:rPr lang="en-US" smtClean="0"/>
+              <a:t>3</a:t>
+            </a:fld>
+            <a:endParaRPr lang="en-US"/>
+          </a:p>
+        </p:txBody>
+      </p:sp>
+    </p:spTree>
+    <p:extLst>
+      <p:ext uri="{BB962C8B-B14F-4D97-AF65-F5344CB8AC3E}">
+        <p14:creationId xmlns:p14="http://schemas.microsoft.com/office/powerpoint/2010/main" val="2897863857"/>
+      </p:ext>
+    </p:extLst>
+  </p:cSld>
+  <p:clrMapOvr>
+    <a:masterClrMapping/>
+  </p:clrMapOvr>
+</p:notes>
+</file>
+
+<file path=ppt/notesSlides/notesSlide4.xml><?xml version="1.0" encoding="utf-8"?>
+<p:notes xmlns:a="http://schemas.openxmlformats.org/drawingml/2006/main" xmlns:r="http://schemas.openxmlformats.org/officeDocument/2006/relationships" xmlns:p="http://schemas.openxmlformats.org/presentationml/2006/main">
+  <p:cSld>
+    <p:spTree>
+      <p:nvGrpSpPr>
+        <p:cNvPr id="1" name="">
+          <a:extLst>
+            <a:ext uri="{FF2B5EF4-FFF2-40B4-BE49-F238E27FC236}">
               <a16:creationId xmlns:a16="http://schemas.microsoft.com/office/drawing/2014/main" id="{A07CC035-E59B-532B-E8C9-B9E2E4F4442E}"/>
             </a:ext>
           </a:extLst>
@@ -723,7 +832,7 @@
           <a:p>
             <a:fld id="{362CD335-F0CB-D347-B8A5-7AB70F34C34F}" type="slidenum">
               <a:rPr lang="en-US" smtClean="0"/>
-              <a:t>3</a:t>
+              <a:t>4</a:t>
             </a:fld>
             <a:endParaRPr lang="en-US"/>
           </a:p>
@@ -995,7 +1104,7 @@
             <a:fld id="{B61BEF0D-F0BB-DE4B-95CE-6DB70DBA9567}" type="datetimeFigureOut">
               <a:rPr lang="en-US" smtClean="0"/>
               <a:pPr/>
-              <a:t>2/25/26</a:t>
+              <a:t>4/6/26</a:t>
             </a:fld>
             <a:endParaRPr lang="en-US" dirty="0"/>
           </a:p>
@@ -1259,7 +1368,7 @@
             <a:fld id="{B61BEF0D-F0BB-DE4B-95CE-6DB70DBA9567}" type="datetimeFigureOut">
               <a:rPr lang="en-US" smtClean="0"/>
               <a:pPr/>
-              <a:t>2/25/26</a:t>
+              <a:t>4/6/26</a:t>
             </a:fld>
             <a:endParaRPr lang="en-US" dirty="0"/>
           </a:p>
@@ -1496,7 +1605,7 @@
             <a:fld id="{B61BEF0D-F0BB-DE4B-95CE-6DB70DBA9567}" type="datetimeFigureOut">
               <a:rPr lang="en-US" smtClean="0"/>
               <a:pPr/>
-              <a:t>2/25/26</a:t>
+              <a:t>4/6/26</a:t>
             </a:fld>
             <a:endParaRPr lang="en-US" dirty="0"/>
           </a:p>
@@ -1745,7 +1854,7 @@
             <a:fld id="{B61BEF0D-F0BB-DE4B-95CE-6DB70DBA9567}" type="datetimeFigureOut">
               <a:rPr lang="en-US" smtClean="0"/>
               <a:pPr/>
-              <a:t>2/25/26</a:t>
+              <a:t>4/6/26</a:t>
             </a:fld>
             <a:endParaRPr lang="en-US" dirty="0"/>
           </a:p>
@@ -2054,7 +2163,7 @@
             <a:fld id="{B61BEF0D-F0BB-DE4B-95CE-6DB70DBA9567}" type="datetimeFigureOut">
               <a:rPr lang="en-US" smtClean="0"/>
               <a:pPr/>
-              <a:t>2/25/26</a:t>
+              <a:t>4/6/26</a:t>
             </a:fld>
             <a:endParaRPr lang="en-US" dirty="0"/>
           </a:p>
@@ -2365,7 +2474,7 @@
             <a:fld id="{B61BEF0D-F0BB-DE4B-95CE-6DB70DBA9567}" type="datetimeFigureOut">
               <a:rPr lang="en-US" smtClean="0"/>
               <a:pPr/>
-              <a:t>2/25/26</a:t>
+              <a:t>4/6/26</a:t>
             </a:fld>
             <a:endParaRPr lang="en-US" dirty="0"/>
           </a:p>
@@ -2789,7 +2898,7 @@
             <a:fld id="{B61BEF0D-F0BB-DE4B-95CE-6DB70DBA9567}" type="datetimeFigureOut">
               <a:rPr lang="en-US" smtClean="0"/>
               <a:pPr/>
-              <a:t>2/25/26</a:t>
+              <a:t>4/6/26</a:t>
             </a:fld>
             <a:endParaRPr lang="en-US" dirty="0"/>
           </a:p>
@@ -2886,7 +2995,7 @@
             <a:fld id="{B61BEF0D-F0BB-DE4B-95CE-6DB70DBA9567}" type="datetimeFigureOut">
               <a:rPr lang="en-US" smtClean="0"/>
               <a:pPr/>
-              <a:t>2/25/26</a:t>
+              <a:t>4/6/26</a:t>
             </a:fld>
             <a:endParaRPr lang="en-US" dirty="0"/>
           </a:p>
@@ -3050,7 +3159,7 @@
             <a:fld id="{B61BEF0D-F0BB-DE4B-95CE-6DB70DBA9567}" type="datetimeFigureOut">
               <a:rPr lang="en-US" smtClean="0"/>
               <a:pPr/>
-              <a:t>2/25/26</a:t>
+              <a:t>4/6/26</a:t>
             </a:fld>
             <a:endParaRPr lang="en-US" dirty="0"/>
           </a:p>
@@ -3430,7 +3539,7 @@
             <a:fld id="{B61BEF0D-F0BB-DE4B-95CE-6DB70DBA9567}" type="datetimeFigureOut">
               <a:rPr lang="en-US" smtClean="0"/>
               <a:pPr/>
-              <a:t>2/25/26</a:t>
+              <a:t>4/6/26</a:t>
             </a:fld>
             <a:endParaRPr lang="en-US" dirty="0"/>
           </a:p>
@@ -3721,7 +3830,7 @@
             <a:fld id="{B61BEF0D-F0BB-DE4B-95CE-6DB70DBA9567}" type="datetimeFigureOut">
               <a:rPr lang="en-US" smtClean="0"/>
               <a:pPr/>
-              <a:t>2/25/26</a:t>
+              <a:t>4/6/26</a:t>
             </a:fld>
             <a:endParaRPr lang="en-US" dirty="0"/>
           </a:p>
@@ -3934,7 +4043,7 @@
             <a:fld id="{B61BEF0D-F0BB-DE4B-95CE-6DB70DBA9567}" type="datetimeFigureOut">
               <a:rPr lang="en-US" smtClean="0"/>
               <a:pPr/>
-              <a:t>2/25/26</a:t>
+              <a:t>4/6/26</a:t>
             </a:fld>
             <a:endParaRPr lang="en-US" dirty="0"/>
           </a:p>
@@ -4668,7 +4777,7 @@
           <a:p>
             <a:r>
               <a:rPr lang="en-US" dirty="0"/>
-              <a:t>Today’s plan</a:t>
+              <a:t>Announcements</a:t>
             </a:r>
           </a:p>
         </p:txBody>
@@ -4691,21 +4800,69 @@
         </p:nvSpPr>
         <p:spPr/>
         <p:txBody>
-          <a:bodyPr anchor="t">
+          <a:bodyPr anchor="ctr">
             <a:noAutofit/>
           </a:bodyPr>
           <a:lstStyle/>
           <a:p>
             <a:r>
-              <a:rPr lang="en-US" sz="2200" dirty="0"/>
-              <a:t>Perform a simple ML modeling task </a:t>
-            </a:r>
-          </a:p>
-          <a:p>
-            <a:r>
-              <a:rPr lang="en-US" sz="2200" dirty="0"/>
-              <a:t>Visualize performance of your model </a:t>
-            </a:r>
+              <a:rPr lang="en-US" sz="2800" dirty="0"/>
+              <a:t>Demo Day is </a:t>
+            </a:r>
+            <a:r>
+              <a:rPr lang="en-US" sz="2800" dirty="0">
+                <a:effectLst>
+                  <a:glow rad="228600">
+                    <a:schemeClr val="accent5">
+                      <a:satMod val="175000"/>
+                      <a:alpha val="40000"/>
+                    </a:schemeClr>
+                  </a:glow>
+                </a:effectLst>
+              </a:rPr>
+              <a:t>April 30</a:t>
+            </a:r>
+            <a:r>
+              <a:rPr lang="en-US" sz="2800" baseline="30000" dirty="0">
+                <a:effectLst>
+                  <a:glow rad="228600">
+                    <a:schemeClr val="accent5">
+                      <a:satMod val="175000"/>
+                      <a:alpha val="40000"/>
+                    </a:schemeClr>
+                  </a:glow>
+                </a:effectLst>
+              </a:rPr>
+              <a:t>th</a:t>
+            </a:r>
+            <a:endParaRPr lang="en-US" sz="2800" dirty="0">
+              <a:effectLst>
+                <a:glow rad="228600">
+                  <a:schemeClr val="accent5">
+                    <a:satMod val="175000"/>
+                    <a:alpha val="40000"/>
+                  </a:schemeClr>
+                </a:glow>
+              </a:effectLst>
+            </a:endParaRPr>
+          </a:p>
+          <a:p>
+            <a:r>
+              <a:rPr lang="en-US" sz="2800" dirty="0">
+                <a:effectLst>
+                  <a:glow rad="228600">
+                    <a:schemeClr val="accent5">
+                      <a:satMod val="175000"/>
+                      <a:alpha val="40000"/>
+                    </a:schemeClr>
+                  </a:glow>
+                </a:effectLst>
+              </a:rPr>
+              <a:t>Demos will take place in this classroom (Ford 342) from 12:15-1:00</a:t>
+            </a:r>
+          </a:p>
+          <a:p>
+            <a:endParaRPr lang="en-US" sz="2200" dirty="0"/>
           </a:p>
           <a:p>
             <a:endParaRPr lang="en-US" sz="2000" dirty="0"/>
@@ -4726,6 +4883,109 @@
 </file>
 
 <file path=ppt/slides/slide3.xml><?xml version="1.0" encoding="utf-8"?>
+<p:sld xmlns:a="http://schemas.openxmlformats.org/drawingml/2006/main" xmlns:r="http://schemas.openxmlformats.org/officeDocument/2006/relationships" xmlns:p="http://schemas.openxmlformats.org/presentationml/2006/main">
+  <p:cSld>
+    <p:spTree>
+      <p:nvGrpSpPr>
+        <p:cNvPr id="1" name="">
+          <a:extLst>
+            <a:ext uri="{FF2B5EF4-FFF2-40B4-BE49-F238E27FC236}">
+              <a16:creationId xmlns:a16="http://schemas.microsoft.com/office/drawing/2014/main" id="{619FC951-DFF3-E5B3-EDD1-A21B41602027}"/>
+            </a:ext>
+          </a:extLst>
+        </p:cNvPr>
+        <p:cNvGrpSpPr/>
+        <p:nvPr/>
+      </p:nvGrpSpPr>
+      <p:grpSpPr>
+        <a:xfrm>
+          <a:off x="0" y="0"/>
+          <a:ext cx="0" cy="0"/>
+          <a:chOff x="0" y="0"/>
+          <a:chExt cx="0" cy="0"/>
+        </a:xfrm>
+      </p:grpSpPr>
+      <p:sp>
+        <p:nvSpPr>
+          <p:cNvPr id="2" name="Title 1">
+            <a:extLst>
+              <a:ext uri="{FF2B5EF4-FFF2-40B4-BE49-F238E27FC236}">
+                <a16:creationId xmlns:a16="http://schemas.microsoft.com/office/drawing/2014/main" id="{7B0AB312-521B-0819-C16C-BCC658C3D542}"/>
+              </a:ext>
+            </a:extLst>
+          </p:cNvPr>
+          <p:cNvSpPr>
+            <a:spLocks noGrp="1"/>
+          </p:cNvSpPr>
+          <p:nvPr>
+            <p:ph type="title"/>
+          </p:nvPr>
+        </p:nvSpPr>
+        <p:spPr/>
+        <p:txBody>
+          <a:bodyPr/>
+          <a:lstStyle/>
+          <a:p>
+            <a:r>
+              <a:rPr lang="en-US" dirty="0"/>
+              <a:t>Today’s plan</a:t>
+            </a:r>
+          </a:p>
+        </p:txBody>
+      </p:sp>
+      <p:sp>
+        <p:nvSpPr>
+          <p:cNvPr id="3" name="Content Placeholder 2">
+            <a:extLst>
+              <a:ext uri="{FF2B5EF4-FFF2-40B4-BE49-F238E27FC236}">
+                <a16:creationId xmlns:a16="http://schemas.microsoft.com/office/drawing/2014/main" id="{B7B39765-30BB-86A0-999B-D30048CBE491}"/>
+              </a:ext>
+            </a:extLst>
+          </p:cNvPr>
+          <p:cNvSpPr>
+            <a:spLocks noGrp="1"/>
+          </p:cNvSpPr>
+          <p:nvPr>
+            <p:ph idx="1"/>
+          </p:nvPr>
+        </p:nvSpPr>
+        <p:spPr/>
+        <p:txBody>
+          <a:bodyPr anchor="t">
+            <a:noAutofit/>
+          </a:bodyPr>
+          <a:lstStyle/>
+          <a:p>
+            <a:r>
+              <a:rPr lang="en-US" sz="2200" dirty="0"/>
+              <a:t>Perform a simple ML modeling task </a:t>
+            </a:r>
+          </a:p>
+          <a:p>
+            <a:r>
+              <a:rPr lang="en-US" sz="2200" dirty="0"/>
+              <a:t>Visualize performance of your model </a:t>
+            </a:r>
+          </a:p>
+          <a:p>
+            <a:endParaRPr lang="en-US" sz="2000" dirty="0"/>
+          </a:p>
+        </p:txBody>
+      </p:sp>
+    </p:spTree>
+    <p:extLst>
+      <p:ext uri="{BB962C8B-B14F-4D97-AF65-F5344CB8AC3E}">
+        <p14:creationId xmlns:p14="http://schemas.microsoft.com/office/powerpoint/2010/main" val="2957645376"/>
+      </p:ext>
+    </p:extLst>
+  </p:cSld>
+  <p:clrMapOvr>
+    <a:masterClrMapping/>
+  </p:clrMapOvr>
+</p:sld>
+</file>
+
+<file path=ppt/slides/slide4.xml><?xml version="1.0" encoding="utf-8"?>
 <p:sld xmlns:a="http://schemas.openxmlformats.org/drawingml/2006/main" xmlns:r="http://schemas.openxmlformats.org/officeDocument/2006/relationships" xmlns:p="http://schemas.openxmlformats.org/presentationml/2006/main">
   <p:cSld>
     <p:spTree>

--- a/slides/16-modeling-lab.pptx
+++ b/slides/16-modeling-lab.pptx
@@ -5,13 +5,14 @@
     <p:sldMasterId id="2147483660" r:id="rId1"/>
   </p:sldMasterIdLst>
   <p:notesMasterIdLst>
-    <p:notesMasterId r:id="rId6"/>
+    <p:notesMasterId r:id="rId7"/>
   </p:notesMasterIdLst>
   <p:sldIdLst>
     <p:sldId id="256" r:id="rId2"/>
     <p:sldId id="257" r:id="rId3"/>
     <p:sldId id="259" r:id="rId4"/>
-    <p:sldId id="258" r:id="rId5"/>
+    <p:sldId id="260" r:id="rId5"/>
+    <p:sldId id="258" r:id="rId6"/>
   </p:sldIdLst>
   <p:sldSz cx="12192000" cy="6858000"/>
   <p:notesSz cx="6858000" cy="9144000"/>
@@ -200,7 +201,7 @@
           <a:p>
             <a:fld id="{2CD22518-F7FE-2E40-9C60-793856882CE6}" type="datetimeFigureOut">
               <a:rPr lang="en-US" smtClean="0"/>
-              <a:t>4/6/26</a:t>
+              <a:t>4/7/26</a:t>
             </a:fld>
             <a:endParaRPr lang="en-US"/>
           </a:p>
@@ -751,6 +752,114 @@
         <p:cNvPr id="1" name="">
           <a:extLst>
             <a:ext uri="{FF2B5EF4-FFF2-40B4-BE49-F238E27FC236}">
+              <a16:creationId xmlns:a16="http://schemas.microsoft.com/office/drawing/2014/main" id="{B8202ED9-73B1-A077-68D5-C0C3EFC13CAD}"/>
+            </a:ext>
+          </a:extLst>
+        </p:cNvPr>
+        <p:cNvGrpSpPr/>
+        <p:nvPr/>
+      </p:nvGrpSpPr>
+      <p:grpSpPr>
+        <a:xfrm>
+          <a:off x="0" y="0"/>
+          <a:ext cx="0" cy="0"/>
+          <a:chOff x="0" y="0"/>
+          <a:chExt cx="0" cy="0"/>
+        </a:xfrm>
+      </p:grpSpPr>
+      <p:sp>
+        <p:nvSpPr>
+          <p:cNvPr id="2" name="Slide Image Placeholder 1">
+            <a:extLst>
+              <a:ext uri="{FF2B5EF4-FFF2-40B4-BE49-F238E27FC236}">
+                <a16:creationId xmlns:a16="http://schemas.microsoft.com/office/drawing/2014/main" id="{64087832-666B-0B7B-3A95-692C0085CA20}"/>
+              </a:ext>
+            </a:extLst>
+          </p:cNvPr>
+          <p:cNvSpPr>
+            <a:spLocks noGrp="1" noRot="1" noChangeAspect="1"/>
+          </p:cNvSpPr>
+          <p:nvPr>
+            <p:ph type="sldImg"/>
+          </p:nvPr>
+        </p:nvSpPr>
+        <p:spPr/>
+      </p:sp>
+      <p:sp>
+        <p:nvSpPr>
+          <p:cNvPr id="3" name="Notes Placeholder 2">
+            <a:extLst>
+              <a:ext uri="{FF2B5EF4-FFF2-40B4-BE49-F238E27FC236}">
+                <a16:creationId xmlns:a16="http://schemas.microsoft.com/office/drawing/2014/main" id="{6D904557-9160-347B-4DB5-883AC02A31A7}"/>
+              </a:ext>
+            </a:extLst>
+          </p:cNvPr>
+          <p:cNvSpPr>
+            <a:spLocks noGrp="1"/>
+          </p:cNvSpPr>
+          <p:nvPr>
+            <p:ph type="body" idx="1"/>
+          </p:nvPr>
+        </p:nvSpPr>
+        <p:spPr/>
+        <p:txBody>
+          <a:bodyPr/>
+          <a:lstStyle/>
+          <a:p>
+            <a:endParaRPr lang="en-US" dirty="0"/>
+          </a:p>
+        </p:txBody>
+      </p:sp>
+      <p:sp>
+        <p:nvSpPr>
+          <p:cNvPr id="4" name="Slide Number Placeholder 3">
+            <a:extLst>
+              <a:ext uri="{FF2B5EF4-FFF2-40B4-BE49-F238E27FC236}">
+                <a16:creationId xmlns:a16="http://schemas.microsoft.com/office/drawing/2014/main" id="{FF2A910F-7DE8-C1F1-5C99-8D6E1066F896}"/>
+              </a:ext>
+            </a:extLst>
+          </p:cNvPr>
+          <p:cNvSpPr>
+            <a:spLocks noGrp="1"/>
+          </p:cNvSpPr>
+          <p:nvPr>
+            <p:ph type="sldNum" sz="quarter" idx="5"/>
+          </p:nvPr>
+        </p:nvSpPr>
+        <p:spPr/>
+        <p:txBody>
+          <a:bodyPr/>
+          <a:lstStyle/>
+          <a:p>
+            <a:fld id="{362CD335-F0CB-D347-B8A5-7AB70F34C34F}" type="slidenum">
+              <a:rPr lang="en-US" smtClean="0"/>
+              <a:t>4</a:t>
+            </a:fld>
+            <a:endParaRPr lang="en-US"/>
+          </a:p>
+        </p:txBody>
+      </p:sp>
+    </p:spTree>
+    <p:extLst>
+      <p:ext uri="{BB962C8B-B14F-4D97-AF65-F5344CB8AC3E}">
+        <p14:creationId xmlns:p14="http://schemas.microsoft.com/office/powerpoint/2010/main" val="2236508859"/>
+      </p:ext>
+    </p:extLst>
+  </p:cSld>
+  <p:clrMapOvr>
+    <a:masterClrMapping/>
+  </p:clrMapOvr>
+</p:notes>
+</file>
+
+<file path=ppt/notesSlides/notesSlide5.xml><?xml version="1.0" encoding="utf-8"?>
+<p:notes xmlns:a="http://schemas.openxmlformats.org/drawingml/2006/main" xmlns:r="http://schemas.openxmlformats.org/officeDocument/2006/relationships" xmlns:p="http://schemas.openxmlformats.org/presentationml/2006/main">
+  <p:cSld>
+    <p:spTree>
+      <p:nvGrpSpPr>
+        <p:cNvPr id="1" name="">
+          <a:extLst>
+            <a:ext uri="{FF2B5EF4-FFF2-40B4-BE49-F238E27FC236}">
               <a16:creationId xmlns:a16="http://schemas.microsoft.com/office/drawing/2014/main" id="{A07CC035-E59B-532B-E8C9-B9E2E4F4442E}"/>
             </a:ext>
           </a:extLst>
@@ -832,7 +941,7 @@
           <a:p>
             <a:fld id="{362CD335-F0CB-D347-B8A5-7AB70F34C34F}" type="slidenum">
               <a:rPr lang="en-US" smtClean="0"/>
-              <a:t>4</a:t>
+              <a:t>5</a:t>
             </a:fld>
             <a:endParaRPr lang="en-US"/>
           </a:p>
@@ -1104,7 +1213,7 @@
             <a:fld id="{B61BEF0D-F0BB-DE4B-95CE-6DB70DBA9567}" type="datetimeFigureOut">
               <a:rPr lang="en-US" smtClean="0"/>
               <a:pPr/>
-              <a:t>4/6/26</a:t>
+              <a:t>4/7/26</a:t>
             </a:fld>
             <a:endParaRPr lang="en-US" dirty="0"/>
           </a:p>
@@ -1368,7 +1477,7 @@
             <a:fld id="{B61BEF0D-F0BB-DE4B-95CE-6DB70DBA9567}" type="datetimeFigureOut">
               <a:rPr lang="en-US" smtClean="0"/>
               <a:pPr/>
-              <a:t>4/6/26</a:t>
+              <a:t>4/7/26</a:t>
             </a:fld>
             <a:endParaRPr lang="en-US" dirty="0"/>
           </a:p>
@@ -1605,7 +1714,7 @@
             <a:fld id="{B61BEF0D-F0BB-DE4B-95CE-6DB70DBA9567}" type="datetimeFigureOut">
               <a:rPr lang="en-US" smtClean="0"/>
               <a:pPr/>
-              <a:t>4/6/26</a:t>
+              <a:t>4/7/26</a:t>
             </a:fld>
             <a:endParaRPr lang="en-US" dirty="0"/>
           </a:p>
@@ -1854,7 +1963,7 @@
             <a:fld id="{B61BEF0D-F0BB-DE4B-95CE-6DB70DBA9567}" type="datetimeFigureOut">
               <a:rPr lang="en-US" smtClean="0"/>
               <a:pPr/>
-              <a:t>4/6/26</a:t>
+              <a:t>4/7/26</a:t>
             </a:fld>
             <a:endParaRPr lang="en-US" dirty="0"/>
           </a:p>
@@ -2163,7 +2272,7 @@
             <a:fld id="{B61BEF0D-F0BB-DE4B-95CE-6DB70DBA9567}" type="datetimeFigureOut">
               <a:rPr lang="en-US" smtClean="0"/>
               <a:pPr/>
-              <a:t>4/6/26</a:t>
+              <a:t>4/7/26</a:t>
             </a:fld>
             <a:endParaRPr lang="en-US" dirty="0"/>
           </a:p>
@@ -2474,7 +2583,7 @@
             <a:fld id="{B61BEF0D-F0BB-DE4B-95CE-6DB70DBA9567}" type="datetimeFigureOut">
               <a:rPr lang="en-US" smtClean="0"/>
               <a:pPr/>
-              <a:t>4/6/26</a:t>
+              <a:t>4/7/26</a:t>
             </a:fld>
             <a:endParaRPr lang="en-US" dirty="0"/>
           </a:p>
@@ -2591,6 +2700,13 @@
             <a:schemeClr val="lt1"/>
           </a:fontRef>
         </p:style>
+        <p:txBody>
+          <a:bodyPr/>
+          <a:lstStyle/>
+          <a:p>
+            <a:endParaRPr lang="en-US"/>
+          </a:p>
+        </p:txBody>
       </p:sp>
       <p:sp>
         <p:nvSpPr>
@@ -2898,7 +3014,7 @@
             <a:fld id="{B61BEF0D-F0BB-DE4B-95CE-6DB70DBA9567}" type="datetimeFigureOut">
               <a:rPr lang="en-US" smtClean="0"/>
               <a:pPr/>
-              <a:t>4/6/26</a:t>
+              <a:t>4/7/26</a:t>
             </a:fld>
             <a:endParaRPr lang="en-US" dirty="0"/>
           </a:p>
@@ -2995,7 +3111,7 @@
             <a:fld id="{B61BEF0D-F0BB-DE4B-95CE-6DB70DBA9567}" type="datetimeFigureOut">
               <a:rPr lang="en-US" smtClean="0"/>
               <a:pPr/>
-              <a:t>4/6/26</a:t>
+              <a:t>4/7/26</a:t>
             </a:fld>
             <a:endParaRPr lang="en-US" dirty="0"/>
           </a:p>
@@ -3159,7 +3275,7 @@
             <a:fld id="{B61BEF0D-F0BB-DE4B-95CE-6DB70DBA9567}" type="datetimeFigureOut">
               <a:rPr lang="en-US" smtClean="0"/>
               <a:pPr/>
-              <a:t>4/6/26</a:t>
+              <a:t>4/7/26</a:t>
             </a:fld>
             <a:endParaRPr lang="en-US" dirty="0"/>
           </a:p>
@@ -3539,7 +3655,7 @@
             <a:fld id="{B61BEF0D-F0BB-DE4B-95CE-6DB70DBA9567}" type="datetimeFigureOut">
               <a:rPr lang="en-US" smtClean="0"/>
               <a:pPr/>
-              <a:t>4/6/26</a:t>
+              <a:t>4/7/26</a:t>
             </a:fld>
             <a:endParaRPr lang="en-US" dirty="0"/>
           </a:p>
@@ -3830,7 +3946,7 @@
             <a:fld id="{B61BEF0D-F0BB-DE4B-95CE-6DB70DBA9567}" type="datetimeFigureOut">
               <a:rPr lang="en-US" smtClean="0"/>
               <a:pPr/>
-              <a:t>4/6/26</a:t>
+              <a:t>4/7/26</a:t>
             </a:fld>
             <a:endParaRPr lang="en-US" dirty="0"/>
           </a:p>
@@ -4043,7 +4159,7 @@
             <a:fld id="{B61BEF0D-F0BB-DE4B-95CE-6DB70DBA9567}" type="datetimeFigureOut">
               <a:rPr lang="en-US" smtClean="0"/>
               <a:pPr/>
-              <a:t>4/6/26</a:t>
+              <a:t>4/7/26</a:t>
             </a:fld>
             <a:endParaRPr lang="en-US" dirty="0"/>
           </a:p>
@@ -4986,6 +5102,110 @@
 </file>
 
 <file path=ppt/slides/slide4.xml><?xml version="1.0" encoding="utf-8"?>
+<p:sld xmlns:a="http://schemas.openxmlformats.org/drawingml/2006/main" xmlns:r="http://schemas.openxmlformats.org/officeDocument/2006/relationships" xmlns:p="http://schemas.openxmlformats.org/presentationml/2006/main">
+  <p:cSld>
+    <p:spTree>
+      <p:nvGrpSpPr>
+        <p:cNvPr id="1" name="">
+          <a:extLst>
+            <a:ext uri="{FF2B5EF4-FFF2-40B4-BE49-F238E27FC236}">
+              <a16:creationId xmlns:a16="http://schemas.microsoft.com/office/drawing/2014/main" id="{CFADA535-4CBB-06A4-13A1-11EAD536C686}"/>
+            </a:ext>
+          </a:extLst>
+        </p:cNvPr>
+        <p:cNvGrpSpPr/>
+        <p:nvPr/>
+      </p:nvGrpSpPr>
+      <p:grpSpPr>
+        <a:xfrm>
+          <a:off x="0" y="0"/>
+          <a:ext cx="0" cy="0"/>
+          <a:chOff x="0" y="0"/>
+          <a:chExt cx="0" cy="0"/>
+        </a:xfrm>
+      </p:grpSpPr>
+      <p:sp>
+        <p:nvSpPr>
+          <p:cNvPr id="2" name="Title 1">
+            <a:extLst>
+              <a:ext uri="{FF2B5EF4-FFF2-40B4-BE49-F238E27FC236}">
+                <a16:creationId xmlns:a16="http://schemas.microsoft.com/office/drawing/2014/main" id="{B17F84E4-57A5-1BCC-4A3B-3F7E19BF56AA}"/>
+              </a:ext>
+            </a:extLst>
+          </p:cNvPr>
+          <p:cNvSpPr>
+            <a:spLocks noGrp="1"/>
+          </p:cNvSpPr>
+          <p:nvPr>
+            <p:ph type="title"/>
+          </p:nvPr>
+        </p:nvSpPr>
+        <p:spPr/>
+        <p:txBody>
+          <a:bodyPr/>
+          <a:lstStyle/>
+          <a:p>
+            <a:r>
+              <a:rPr lang="en-US" dirty="0"/>
+              <a:t>Warm up</a:t>
+            </a:r>
+          </a:p>
+        </p:txBody>
+      </p:sp>
+      <p:sp>
+        <p:nvSpPr>
+          <p:cNvPr id="3" name="Content Placeholder 2">
+            <a:extLst>
+              <a:ext uri="{FF2B5EF4-FFF2-40B4-BE49-F238E27FC236}">
+                <a16:creationId xmlns:a16="http://schemas.microsoft.com/office/drawing/2014/main" id="{A3831539-DE3A-A0F9-85B9-26876CE75A24}"/>
+              </a:ext>
+            </a:extLst>
+          </p:cNvPr>
+          <p:cNvSpPr>
+            <a:spLocks noGrp="1"/>
+          </p:cNvSpPr>
+          <p:nvPr>
+            <p:ph idx="1"/>
+          </p:nvPr>
+        </p:nvSpPr>
+        <p:spPr/>
+        <p:txBody>
+          <a:bodyPr anchor="ctr">
+            <a:noAutofit/>
+          </a:bodyPr>
+          <a:lstStyle/>
+          <a:p>
+            <a:r>
+              <a:rPr lang="en-US" sz="2200" dirty="0"/>
+              <a:t>Name two evaluation measures used in modeling. What does each capture? </a:t>
+            </a:r>
+          </a:p>
+          <a:p>
+            <a:endParaRPr lang="en-US" sz="2200" dirty="0"/>
+          </a:p>
+          <a:p>
+            <a:r>
+              <a:rPr lang="en-US" sz="2200" dirty="0"/>
+              <a:t>Name two methods for visualizing evaluation measures </a:t>
+            </a:r>
+            <a:endParaRPr lang="en-US" sz="2000" dirty="0"/>
+          </a:p>
+        </p:txBody>
+      </p:sp>
+    </p:spTree>
+    <p:extLst>
+      <p:ext uri="{BB962C8B-B14F-4D97-AF65-F5344CB8AC3E}">
+        <p14:creationId xmlns:p14="http://schemas.microsoft.com/office/powerpoint/2010/main" val="1846555535"/>
+      </p:ext>
+    </p:extLst>
+  </p:cSld>
+  <p:clrMapOvr>
+    <a:masterClrMapping/>
+  </p:clrMapOvr>
+</p:sld>
+</file>
+
+<file path=ppt/slides/slide5.xml><?xml version="1.0" encoding="utf-8"?>
 <p:sld xmlns:a="http://schemas.openxmlformats.org/drawingml/2006/main" xmlns:r="http://schemas.openxmlformats.org/officeDocument/2006/relationships" xmlns:p="http://schemas.openxmlformats.org/presentationml/2006/main">
   <p:cSld>
     <p:spTree>
